--- a/prez.pptx
+++ b/prez.pptx
@@ -247,7 +247,7 @@
           <a:p>
             <a:fld id="{FBF85113-0A24-864F-A151-10CE0B4A1FAB}" type="datetimeFigureOut">
               <a:rPr lang="cs-CZ" smtClean="0"/>
-              <a:t>13.09.2026</a:t>
+              <a:t>16.09.2026</a:t>
             </a:fld>
             <a:endParaRPr lang="cs-CZ"/>
           </a:p>
@@ -417,7 +417,7 @@
           <a:p>
             <a:fld id="{FBF85113-0A24-864F-A151-10CE0B4A1FAB}" type="datetimeFigureOut">
               <a:rPr lang="cs-CZ" smtClean="0"/>
-              <a:t>13.09.2026</a:t>
+              <a:t>16.09.2026</a:t>
             </a:fld>
             <a:endParaRPr lang="cs-CZ"/>
           </a:p>
@@ -597,7 +597,7 @@
           <a:p>
             <a:fld id="{FBF85113-0A24-864F-A151-10CE0B4A1FAB}" type="datetimeFigureOut">
               <a:rPr lang="cs-CZ" smtClean="0"/>
-              <a:t>13.09.2026</a:t>
+              <a:t>16.09.2026</a:t>
             </a:fld>
             <a:endParaRPr lang="cs-CZ"/>
           </a:p>
@@ -767,7 +767,7 @@
           <a:p>
             <a:fld id="{FBF85113-0A24-864F-A151-10CE0B4A1FAB}" type="datetimeFigureOut">
               <a:rPr lang="cs-CZ" smtClean="0"/>
-              <a:t>13.09.2026</a:t>
+              <a:t>16.09.2026</a:t>
             </a:fld>
             <a:endParaRPr lang="cs-CZ"/>
           </a:p>
@@ -1013,7 +1013,7 @@
           <a:p>
             <a:fld id="{FBF85113-0A24-864F-A151-10CE0B4A1FAB}" type="datetimeFigureOut">
               <a:rPr lang="cs-CZ" smtClean="0"/>
-              <a:t>13.09.2026</a:t>
+              <a:t>16.09.2026</a:t>
             </a:fld>
             <a:endParaRPr lang="cs-CZ"/>
           </a:p>
@@ -1245,7 +1245,7 @@
           <a:p>
             <a:fld id="{FBF85113-0A24-864F-A151-10CE0B4A1FAB}" type="datetimeFigureOut">
               <a:rPr lang="cs-CZ" smtClean="0"/>
-              <a:t>13.09.2026</a:t>
+              <a:t>16.09.2026</a:t>
             </a:fld>
             <a:endParaRPr lang="cs-CZ"/>
           </a:p>
@@ -1612,7 +1612,7 @@
           <a:p>
             <a:fld id="{FBF85113-0A24-864F-A151-10CE0B4A1FAB}" type="datetimeFigureOut">
               <a:rPr lang="cs-CZ" smtClean="0"/>
-              <a:t>13.09.2026</a:t>
+              <a:t>16.09.2026</a:t>
             </a:fld>
             <a:endParaRPr lang="cs-CZ"/>
           </a:p>
@@ -1730,7 +1730,7 @@
           <a:p>
             <a:fld id="{FBF85113-0A24-864F-A151-10CE0B4A1FAB}" type="datetimeFigureOut">
               <a:rPr lang="cs-CZ" smtClean="0"/>
-              <a:t>13.09.2026</a:t>
+              <a:t>16.09.2026</a:t>
             </a:fld>
             <a:endParaRPr lang="cs-CZ"/>
           </a:p>
@@ -1825,7 +1825,7 @@
           <a:p>
             <a:fld id="{FBF85113-0A24-864F-A151-10CE0B4A1FAB}" type="datetimeFigureOut">
               <a:rPr lang="cs-CZ" smtClean="0"/>
-              <a:t>13.09.2026</a:t>
+              <a:t>16.09.2026</a:t>
             </a:fld>
             <a:endParaRPr lang="cs-CZ"/>
           </a:p>
@@ -2102,7 +2102,7 @@
           <a:p>
             <a:fld id="{FBF85113-0A24-864F-A151-10CE0B4A1FAB}" type="datetimeFigureOut">
               <a:rPr lang="cs-CZ" smtClean="0"/>
-              <a:t>13.09.2026</a:t>
+              <a:t>16.09.2026</a:t>
             </a:fld>
             <a:endParaRPr lang="cs-CZ"/>
           </a:p>
@@ -2359,7 +2359,7 @@
           <a:p>
             <a:fld id="{FBF85113-0A24-864F-A151-10CE0B4A1FAB}" type="datetimeFigureOut">
               <a:rPr lang="cs-CZ" smtClean="0"/>
-              <a:t>13.09.2026</a:t>
+              <a:t>16.09.2026</a:t>
             </a:fld>
             <a:endParaRPr lang="cs-CZ"/>
           </a:p>
@@ -2572,7 +2572,7 @@
           <a:p>
             <a:fld id="{FBF85113-0A24-864F-A151-10CE0B4A1FAB}" type="datetimeFigureOut">
               <a:rPr lang="cs-CZ" smtClean="0"/>
-              <a:t>13.09.2026</a:t>
+              <a:t>16.09.2026</a:t>
             </a:fld>
             <a:endParaRPr lang="cs-CZ"/>
           </a:p>
@@ -3322,8 +3322,8 @@
           </a:p>
         </p:txBody>
       </p:sp>
-      <mc:AlternateContent xmlns:mc="http://schemas.openxmlformats.org/markup-compatibility/2006">
-        <mc:Choice xmlns:a14="http://schemas.microsoft.com/office/drawing/2010/main" Requires="a14">
+      <mc:AlternateContent xmlns:mc="http://schemas.openxmlformats.org/markup-compatibility/2006" xmlns:a14="http://schemas.microsoft.com/office/drawing/2010/main">
+        <mc:Choice Requires="a14">
           <p:sp>
             <p:nvSpPr>
               <p:cNvPr id="7" name="TextovéPole 6">
@@ -3479,7 +3479,7 @@
             </p:txBody>
           </p:sp>
         </mc:Choice>
-        <mc:Fallback>
+        <mc:Fallback xmlns="">
           <p:sp>
             <p:nvSpPr>
               <p:cNvPr id="7" name="TextovéPole 6">
@@ -3772,7 +3772,7 @@
         </p:blipFill>
         <p:spPr>
           <a:xfrm>
-            <a:off x="0" y="669469"/>
+            <a:off x="0" y="724332"/>
             <a:ext cx="4940936" cy="5814459"/>
           </a:xfrm>
           <a:prstGeom prst="rect">
@@ -4754,8 +4754,8 @@
           </a:prstGeom>
         </p:spPr>
       </p:pic>
-      <mc:AlternateContent xmlns:mc="http://schemas.openxmlformats.org/markup-compatibility/2006">
-        <mc:Choice xmlns:a14="http://schemas.microsoft.com/office/drawing/2010/main" Requires="a14">
+      <mc:AlternateContent xmlns:mc="http://schemas.openxmlformats.org/markup-compatibility/2006" xmlns:a14="http://schemas.microsoft.com/office/drawing/2010/main">
+        <mc:Choice Requires="a14">
           <p:sp>
             <p:nvSpPr>
               <p:cNvPr id="84" name="TextovéPole 83">
@@ -4834,7 +4834,7 @@
             </p:txBody>
           </p:sp>
         </mc:Choice>
-        <mc:Fallback>
+        <mc:Fallback xmlns="">
           <p:sp>
             <p:nvSpPr>
               <p:cNvPr id="84" name="TextovéPole 83">
@@ -4879,8 +4879,8 @@
           </p:sp>
         </mc:Fallback>
       </mc:AlternateContent>
-      <mc:AlternateContent xmlns:mc="http://schemas.openxmlformats.org/markup-compatibility/2006">
-        <mc:Choice xmlns:a14="http://schemas.microsoft.com/office/drawing/2010/main" Requires="a14">
+      <mc:AlternateContent xmlns:mc="http://schemas.openxmlformats.org/markup-compatibility/2006" xmlns:a14="http://schemas.microsoft.com/office/drawing/2010/main">
+        <mc:Choice Requires="a14">
           <p:sp>
             <p:nvSpPr>
               <p:cNvPr id="85" name="TextovéPole 84">
@@ -5036,7 +5036,7 @@
             </p:txBody>
           </p:sp>
         </mc:Choice>
-        <mc:Fallback>
+        <mc:Fallback xmlns="">
           <p:sp>
             <p:nvSpPr>
               <p:cNvPr id="85" name="TextovéPole 84">
@@ -5658,8 +5658,8 @@
           </a:p>
         </p:txBody>
       </p:sp>
-      <mc:AlternateContent xmlns:mc="http://schemas.openxmlformats.org/markup-compatibility/2006">
-        <mc:Choice xmlns:a14="http://schemas.microsoft.com/office/drawing/2010/main" Requires="a14">
+      <mc:AlternateContent xmlns:mc="http://schemas.openxmlformats.org/markup-compatibility/2006" xmlns:a14="http://schemas.microsoft.com/office/drawing/2010/main">
+        <mc:Choice Requires="a14">
           <p:sp>
             <p:nvSpPr>
               <p:cNvPr id="100" name="TextovéPole 99">
@@ -5896,7 +5896,7 @@
             </p:txBody>
           </p:sp>
         </mc:Choice>
-        <mc:Fallback>
+        <mc:Fallback xmlns="">
           <p:sp>
             <p:nvSpPr>
               <p:cNvPr id="100" name="TextovéPole 99">
@@ -7419,8 +7419,8 @@
           </a:p>
         </p:txBody>
       </p:sp>
-      <mc:AlternateContent xmlns:mc="http://schemas.openxmlformats.org/markup-compatibility/2006">
-        <mc:Choice xmlns:a14="http://schemas.microsoft.com/office/drawing/2010/main" Requires="a14">
+      <mc:AlternateContent xmlns:mc="http://schemas.openxmlformats.org/markup-compatibility/2006" xmlns:a14="http://schemas.microsoft.com/office/drawing/2010/main">
+        <mc:Choice Requires="a14">
           <p:sp>
             <p:nvSpPr>
               <p:cNvPr id="116" name="TextovéPole 115">
@@ -7657,7 +7657,7 @@
             </p:txBody>
           </p:sp>
         </mc:Choice>
-        <mc:Fallback>
+        <mc:Fallback xmlns="">
           <p:sp>
             <p:nvSpPr>
               <p:cNvPr id="116" name="TextovéPole 115">
